--- a/presentations/PBI_Lineage_Explorer_User_Value_Architecture.pptx
+++ b/presentations/PBI_Lineage_Explorer_User_Value_Architecture.pptx
@@ -3864,13 +3864,13 @@
               </a:spcAft>
             </a:pPr>
             <a:r>
-              <a:rPr sz="2700" b="1">
+              <a:rPr sz="2500" b="1">
                 <a:solidFill>
                   <a:srgbClr val="10213D"/>
                 </a:solidFill>
                 <a:latin typeface="Segoe UI"/>
               </a:rPr>
-              <a:t>Get lineage answers in minutes, not hours</a:t>
+              <a:t>Get lineage answers in minutes — with PowerAI</a:t>
             </a:r>
           </a:p>
         </p:txBody>
@@ -3906,13 +3906,13 @@
               </a:spcAft>
             </a:pPr>
             <a:r>
-              <a:rPr sz="1300" b="0">
+              <a:rPr sz="1250" b="0">
                 <a:solidFill>
                   <a:srgbClr val="5E6D85"/>
                 </a:solidFill>
                 <a:latin typeface="Segoe UI"/>
               </a:rPr>
-              <a:t>Instead of opening reports one by one, a BI user searches once and sees the connected report, model, measure, visual and source details.</a:t>
+              <a:t>Search once. PowerAI's agentic AI follows connected report, model, DAX, visual and source evidence—then explains the result in plain language.</a:t>
             </a:r>
           </a:p>
         </p:txBody>
@@ -4500,13 +4500,13 @@
               </a:spcAft>
             </a:pPr>
             <a:r>
-              <a:rPr sz="1400" b="1">
+              <a:rPr sz="1350" b="1">
                 <a:solidFill>
                   <a:srgbClr val="10213D"/>
                 </a:solidFill>
                 <a:latin typeface="Segoe UI"/>
               </a:rPr>
-              <a:t>The app does the report-by-report work</a:t>
+              <a:t>PowerAI does the report-by-report work</a:t>
             </a:r>
           </a:p>
         </p:txBody>
@@ -4542,13 +4542,13 @@
               </a:spcAft>
             </a:pPr>
             <a:r>
-              <a:rPr sz="950" b="0">
+              <a:rPr sz="900" b="0">
                 <a:solidFill>
                   <a:srgbClr val="5E6D85"/>
                 </a:solidFill>
                 <a:latin typeface="Segoe UI"/>
               </a:rPr>
-              <a:t>It inventories authorized assets, joins metadata by stable IDs and traces impact across BI and source layers.</a:t>
+              <a:t>Specialist agents use approved Power BI, Fabric, XMLA and Snowflake tools to join metadata and trace impact.</a:t>
             </a:r>
           </a:p>
         </p:txBody>
@@ -5815,10 +5815,12 @@
             <a:avLst/>
           </a:prstGeom>
           <a:solidFill>
-            <a:srgbClr val="EEF2F7"/>
+            <a:srgbClr val="EDE9FE"/>
           </a:solidFill>
           <a:ln>
-            <a:noFill/>
+            <a:solidFill>
+              <a:srgbClr val="C4B5FD"/>
+            </a:solidFill>
           </a:ln>
         </p:spPr>
         <p:style>
@@ -5876,11 +5878,11 @@
             <a:r>
               <a:rPr sz="800" b="1">
                 <a:solidFill>
-                  <a:srgbClr val="10213D"/>
+                  <a:srgbClr val="6D28D9"/>
                 </a:solidFill>
                 <a:latin typeface="Segoe UI"/>
               </a:rPr>
-              <a:t>ONE SEARCH  |  MINUTES TO AN EVIDENCE-BACKED ANSWER</a:t>
+              <a:t>POWERAI • AGENTIC AI  |  GROUNDED ANSWERS</a:t>
             </a:r>
           </a:p>
         </p:txBody>
@@ -5916,13 +5918,13 @@
               </a:spcAft>
             </a:pPr>
             <a:r>
-              <a:rPr sz="1400" b="1">
+              <a:rPr sz="1350" b="1">
                 <a:solidFill>
                   <a:srgbClr val="10213D"/>
                 </a:solidFill>
                 <a:latin typeface="Segoe UI"/>
               </a:rPr>
-              <a:t>What people gain</a:t>
+              <a:t>What PowerAI adds</a:t>
             </a:r>
           </a:p>
         </p:txBody>
@@ -6331,7 +6333,7 @@
             <a:avLst/>
           </a:prstGeom>
           <a:solidFill>
-            <a:srgbClr val="EA580C"/>
+            <a:srgbClr val="7C3AED"/>
           </a:solidFill>
           <a:ln>
             <a:noFill/>
@@ -6396,7 +6398,7 @@
                 </a:solidFill>
                 <a:latin typeface="Segoe UI"/>
               </a:rPr>
-              <a:t>Clean output</a:t>
+              <a:t>Grounded AI answers</a:t>
             </a:r>
           </a:p>
         </p:txBody>
@@ -6432,13 +6434,13 @@
               </a:spcAft>
             </a:pPr>
             <a:r>
-              <a:rPr sz="850" b="0">
+              <a:rPr sz="819" b="0">
                 <a:solidFill>
                   <a:srgbClr val="5E6D85"/>
                 </a:solidFill>
                 <a:latin typeface="Segoe UI"/>
               </a:rPr>
-              <a:t>Download the actual PowerAI response as simple Markdown.</a:t>
+              <a:t>Plain-language definitions, DAX and lineage diagrams—grounded in retrieved evidence.</a:t>
             </a:r>
           </a:p>
         </p:txBody>
@@ -6474,13 +6476,13 @@
               </a:spcAft>
             </a:pPr>
             <a:r>
-              <a:rPr sz="869" b="1">
+              <a:rPr sz="840" b="1">
                 <a:solidFill>
                   <a:srgbClr val="5E6D85"/>
                 </a:solidFill>
                 <a:latin typeface="Segoe UI"/>
               </a:rPr>
-              <a:t>The app explains evidence; it does not invent lineage.</a:t>
+              <a:t>PowerAI explains retrieved evidence; it does not invent lineage.</a:t>
             </a:r>
           </a:p>
         </p:txBody>
